--- a/presentations/b10-cloud-boundary-technical/B10_Cloud_Boundary_Technical.pptx
+++ b/presentations/b10-cloud-boundary-technical/B10_Cloud_Boundary_Technical.pptx
@@ -143,13 +143,13 @@
   <p:extLst>
     <p:ext uri="{521415D9-36F7-43E2-AB2F-B90AF26B5E84}">
       <p14:sectionLst xmlns:p14="http://schemas.microsoft.com/office/powerpoint/2010/main">
-        <p14:section name="Orientation" id="{4403eda7-bd67-a87f-4acc-66c3be7c2e5e}">
+        <p14:section name="Orientation" id="{0810a713-a83d-aa82-4d54-d6fbaf949f1a}">
           <p14:sldIdLst>
             <p14:sldId id="256"/>
             <p14:sldId id="257"/>
           </p14:sldIdLst>
         </p14:section>
-        <p14:section name="Part 1 — The boundary and what it removes" id="{26533ccb-5a3d-6328-74b9-bc44f3414570}">
+        <p14:section name="Part 1 — The boundary and what it removes" id="{f0626591-276b-aa82-2181-fde7ccbcca46}">
           <p14:sldIdLst>
             <p14:sldId id="258"/>
             <p14:sldId id="259"/>
@@ -167,7 +167,7 @@
             <p14:sldId id="271"/>
           </p14:sldIdLst>
         </p14:section>
-        <p14:section name="Part 2 — Building it and owning it" id="{82760203-c038-e9bd-4865-9c3be3063d96}">
+        <p14:section name="Part 2 — Building it and owning it" id="{a4916a5c-6f7a-96fa-c412-576a85260076}">
           <p14:sldIdLst>
             <p14:sldId id="272"/>
             <p14:sldId id="273"/>
@@ -187,7 +187,7 @@
             <p14:sldId id="287"/>
           </p14:sldIdLst>
         </p14:section>
-        <p14:section name="Backup" id="{260e3773-1b0b-72ab-5eb8-6f73b8294b48}">
+        <p14:section name="Backup" id="{15a16e4c-4db6-33f0-3518-c8b03ee02c15}">
           <p14:sldIdLst>
             <p14:sldId id="288"/>
             <p14:sldId id="289"/>
@@ -1691,7 +1691,7 @@
           <a:p>
             <a:r>
               <a:rPr lang="en-US" dirty="0"/>
-              <a:t>[30:57–32:43]  AWS expresses the same structure with Organizations: accounts for subscriptions, organizational units for management groups, service control policies for deny assignments. An SCP never grants a permission; it sets the maximum for IAM users and roles in member accounts, including the root user, doesn't affect the management account, and needs an organization with all features enabled. Control Tower runs in both GovCloud Regions, differently. Accounts can't be created inside GovCloud: CreateGovCloudAccount runs from a commercial management account and creates a pair, a standalone GovCloud account and a linked commercial one for billing and support. The GovCloud organization is independent, and its Audit and Log Archive accounts must exist before setup. Account Factory's Create account isn't available, and new customers can't deploy Account Factory for Terraform there. Control Tower metadata must not contain export-controlled data. Landing Zone Accelerator supports the GovCloud partition and, in AWS's words, won't by itself make you compliant.
+              <a:t>[30:57–33:09]  AWS expresses the same structure with Organizations: accounts for subscriptions, organizational units for management groups, service control policies for deny assignments. An SCP never grants a permission; it sets the maximum for IAM users and roles in member accounts, including the root user, doesn't affect the management account, and needs an organization with all features enabled. Control Tower runs in both GovCloud Regions, differently. Accounts can't be created inside GovCloud: CreateGovCloudAccount runs from a commercial management account and creates a pair, a standalone GovCloud account and a linked commercial one for billing and support. The GovCloud organization is independent, and its Audit and Log Archive accounts must exist before setup. Account Factory's Create account isn't available, and new customers can't deploy Account Factory for Terraform there. Control Tower metadata must not contain export-controlled data. Landing Zone Accelerator supports the GovCloud partition and, in AWS's words, won't by itself make you compliant. GovCloud isn't only for High. Its Class D baseline contains the Moderate controls, so a Moderate system can run there or in the Class C commercial Regions; an agency may run most AWS workloads in GovCloud at Moderate and a contact center in the commercial Regions. AWS marks each service in scope per Region, so check the service, not just the partition.
 The landing zone constrains what people deploy. Automation needs its own contract, because a collector that calls a commercial-only API from inside the boundary is a crossing nobody approved. The program's cloud specification is design guidance: every adapter operates in-boundary or through a named exception a formal decision added to a short canonical list, with no third option; endpoints resolve from the declared cloud; an unknown cloud fails closed; and every claim records its boundary, tenant, region and endpoint class: Graph v1.0, Graph beta, Resource Manager or Arc. A crossing without a declared exception shows up as provenance drift.
 Workbook: Book 10, Chapter 05, "The same pattern on AWS," "Every automation declares its boundary."</a:t>
             </a:r>
@@ -1781,7 +1781,7 @@
           <a:p>
             <a:r>
               <a:rPr lang="en-US" dirty="0"/>
-              <a:t>[32:43–34:30]  Every deployment draws on an address and a network path, and both need one authority. CM-8 asks for an inventory that accurately reflects the system, includes all components, and doesn't double-count or include another system's components. Each of those tests needs a reference population. A scan enumerates what answered during a window; IPAM enumerates what was allocated. Without reconciliation, the scan is a sample with no denominator. That's the program's design position. BOD 23-01 points the same way: automated discovery every 7 days covering at minimum the entire IPv4 space used by the agency, a number only the address plan supplies.
+              <a:t>[33:09–34:57]  Every deployment draws on an address and a network path, and both need one authority. CM-8 asks for an inventory that accurately reflects the system, includes all components, and doesn't double-count or include another system's components. Each of those tests needs a reference population. A scan enumerates what answered during a window; IPAM enumerates what was allocated. Without reconciliation, the scan is a sample with no denominator. That's the program's design position. BOD 23-01 points the same way: automated discovery every 7 days covering at minimum the entire IPv4 space used by the agency, a number only the address plan supplies.
 One correction: an authorization boundary isn't defined by IP ranges. SaaS components may hold no agency address. And IPAM can't see installed software, patch state, owner, classification, boundary membership, relationships, or address-less assets like smart cards and HSMs. So IPAM is the join key and a CMDB is the asset record. The program sets requirements rather than naming a product. A proof of concept tests one managed laptop joining MDM record, lease, certificate and FQDN; an unenrolled device appearing within one lease cycle; and two owners who can't see each other's assets.
 Software-defined networks have no broadcast. Azure assigns from the subnet and reserves five addresses. AWS reserves five too, with the Amazon DNS server at the VPC base plus two, which is a DNS server, not a DHCP responder. NSX handles DHCP at the logical gateways, and VCF 9.1 integrates natively with an enterprise IPAM. So the plan lives above all of them.
 Workbook: Book 10, Chapter 06 — IPAM and Network as Code, "The address plan is the join key," "What IPAM can't see," "Addresses without broadcast."</a:t>
@@ -1872,7 +1872,7 @@
           <a:p>
             <a:r>
               <a:rPr lang="en-US" dirty="0"/>
-              <a:t>[34:30–36:18]  Azure Virtual Network Manager's IPAM creates a root pool and child pools up to seven layers. Virtual networks allocate non-overlapping CIDRs; static CIDRs reserve ranges in use outside Azure; IPv4 and IPv6 are supported; one pool can serve several regions; and the IPAM Pool User role lets teams consume a pool without managing it. Microsoft lists it as generally available wherever Virtual Network Manager is, except six regions, none in the United States.
+              <a:t>[34:57–36:44]  Azure Virtual Network Manager's IPAM creates a root pool and child pools up to seven layers. Virtual networks allocate non-overlapping CIDRs; static CIDRs reserve ranges in use outside Azure; IPv4 and IPv6 are supported; one pool can serve several regions; and the IPAM Pool User role lets teams consume a pool without managing it. Microsoft lists it as generally available wherever Virtual Network Manager is, except six regions, none in the United States.
 The pattern keeps the enterprise IPAM authoritative. Reserve first in the enterprise IPAM. Mirror: the Azure root pool holds the Azure range, and every overlapping range used elsewhere goes in as a static CIDR so Azure can't hand it out. Enforce: Virtual Network Manager doesn't stop overlap on its own; Microsoft's documented fix is a policy that denies any virtual network without an allocation from the designated pool. A virtual network then asks for a size, and the pool picks the prefix. Then reconcile with DDI discovery; a mismatch is a finding. The Bicep and policy samples are in the chapter, illustrative and untested; roll out audit first.
 Now the book's argument in miniature. Virtual Network Manager isn't named in Microsoft's FedRAMP audit-scope tables for either cloud, last updated February 2026, while Virtual Network, DNS, Firewall and Private Link are. Until Microsoft confirms it in writing, record the pool as a dependency and pick a Chapter 09 path. Check the enterprise IPAM's own status too: Infoblox Government Cloud is Class C, and its listing now covers Universal DDI and Universal Asset Insights.
 Workbook: Book 10, Chapter 06, "Azure: mirror the authority, enforce the pool," "A boundary check on the IPAM service itself."</a:t>
@@ -1963,7 +1963,7 @@
           <a:p>
             <a:r>
               <a:rPr lang="en-US" dirty="0"/>
-              <a:t>[36:18–38:08]  The landing zone, the address plan and the network can all be built from reviewed source. The program's compliance volume organizes the build as five modules, each owning one plane and depending only on the layers beneath it. Each module writes its deployed state to the evidence record, and the ipam module's output is what makes the CM-8 join possible. The substitution column is the point of naming mechanisms rather than products: changing vendors changes syntax and connectors, not what the module does.
+              <a:t>[36:44–38:34]  The landing zone, the address plan and the network can all be built from reviewed source. The program's compliance volume organizes the build as five modules, each owning one plane and depending only on the layers beneath it. Each module writes its deployed state to the evidence record, and the ipam module's output is what makes the CM-8 join possible. The substitution column is the point of naming mechanisms rather than products: changing vendors changes syntax and connectors, not what the module does.
 The naming module declares its properties instead of clicking them: an authoritative, DNSSEC-signed zone for SC-20; a validating resolver for SC-21; separate authoritative and recursive resources for SC-22; query logging for AU-12; a response policy zone on a named Protective DNS feed, starting log-only, for SC-7 and SI-4; and the zone identifier as an output the inventory join consumes.
 Deploy in order through the change-controlled pipeline, never a portal: platform, then ipam, then ddi and network; run the response policy zone log-only first, then enforce; register the ipam output as the authoritative inventory source; and point the edge at the ddi resolver.
 Some inputs change underneath the code. Microsoft 365's web service has four instances, and a GCC tenant uses Worldwide, so blocking commercial endpoints would block GCC itself. Entries update at the start of each month, with 30 days' notice before new endpoints are used. Each change becomes a pipeline change, so the lag is bounded and recorded. CM-2(2) and CM-8(1) state why reproducible matters: a scanner can only measure drift from a source of truth.
@@ -2055,7 +2055,7 @@
           <a:p>
             <a:r>
               <a:rPr lang="en-US" dirty="0"/>
-              <a:t>[38:08–39:54]  A module any engineer with credentials can apply is no more controlled than the portal it replaced. CM-3 asks for proposed changes to be reviewed and approved with explicit consideration of security and privacy impact, decisions documented, only approved changes implemented, and records kept. Code supplies the reviewable artifact, not the approval, the record or the guarantee. CM-3(2) adds testing before changes are finalized, and CM-8(1) inventory updates as part of installation, not afterward; all are in the Moderate baseline.
+              <a:t>[38:34–40:20]  A module any engineer with credentials can apply is no more controlled than the portal it replaced. CM-3 asks for proposed changes to be reviewed and approved with explicit consideration of security and privacy impact, decisions documented, only approved changes implemented, and records kept. Code supplies the reviewable artifact, not the approval, the record or the guarantee. CM-3(2) adds testing before changes are finalized, and CM-8(1) inventory updates as part of installation, not afterward; all are in the Moderate baseline.
 Microsoft calls its version subscription vending, "an official front door": request capture and approval inside the existing ITSM tool, tied to the deployment pipeline; intake of budget, owner, networking and classification, so the subscription lands in the right management group; an IPAM system in the vending process; the platform team always creating the virtual networks that peer to the hub; and access set at creation, with PIM for groups.
 The loop's step names and order are the program's design. Separation of duties is AC-5; CM-5 restricts who can make changes, which is the pipeline identity that alone may apply.
 Step 5 carries the weight. An address block that code allocated but never reconciled is shadow inventory the moment it exists: CM-8 fails, and BOD 23-01's weekly discovery chases a range the agency's records don't contain. So the pipeline asks the IPAM for the block, or confirms the pool's choice against the enterprise reservation, writes the allocation back with the request number and owner, and fails the run if the two disagree.
@@ -2147,7 +2147,7 @@
           <a:p>
             <a:r>
               <a:rPr lang="en-US" dirty="0"/>
-              <a:t>[39:54–41:33]  Two documented integrations can carry the loop on ServiceNow and Terraform. ServiceNow Cloud Provisioning and Governance creates a catalog item from a Terraform template; the provider type decides where Terraform runs, on a Linux or Windows server or Terraform Enterprise or Cloud, reached through a MID Server; credentials come from Terraform variables, not templates; and its instructions describe no plan-review step. HashiCorp's ServiceNow Service Catalog for Terraform, version 2.9 in October 2025, generates a plan-only run for a designated approver; on acceptance an apply run provisions, and on rejection the run is discarded and nothing changes. ServiceNow's Government Community Cloud is Class D.
+              <a:t>[40:20–41:59]  Two documented integrations can carry the loop on ServiceNow and Terraform. ServiceNow Cloud Provisioning and Governance creates a catalog item from a Terraform template; the provider type decides where Terraform runs, on a Linux or Windows server or Terraform Enterprise or Cloud, reached through a MID Server; credentials come from Terraform variables, not templates; and its instructions describe no plan-review step. HashiCorp's ServiceNow Service Catalog for Terraform, version 2.9 in October 2025, generates a plan-only run for a designated approver; on acceptance an apply run provisions, and on rejection the run is discarded and nothing changes. ServiceNow's Government Community Cloud is Class D.
 The pipeline is inside the boundary. HashiCorp warns that secrets end up in state and plan files, values marked sensitive are still stored there, and anyone with access can read them. As of October 21, 2026 the Marketplace has no HCP Terraform listing, GitHub Enterprise Cloud is Class B under LI-SaaS, and GitLab Dedicated for Government is Class C. None forbids a tool; each inherits a matching certification, is carried in the package, or takes an exception. The program's default is a self-hosted runner and state backend inside the boundary. Vending identities can't use PIM, so they hold standing access.
 After apply, policy re-evaluation catches drift. Plans that destroy or replace get a second approver; break-glass use is an exception to review; and keep modules small enough that plans get read.
 Workbook: Book 10, Chapter 07, "Building the loop on ServiceNow and Terraform," "The pipeline is inside the boundary too," "After apply: drift," "Honest limits."</a:t>
@@ -2238,7 +2238,7 @@
           <a:p>
             <a:r>
               <a:rPr lang="en-US" dirty="0"/>
-              <a:t>[41:33–42:08]  Module 4: who owns the boundary, and how it lands in the authorization package. A cloud boundary has more owners than anything else in the workbook, and the gaps between them are where features quietly disappear. We'll name one decider per row, then write the boundary down once, as a record that the system security plan, the POA&amp;M, the component definition and continuous monitoring all cite. Then control narratives at the boundary, keeping the package current, and what to ask a provider for.
+              <a:t>[41:59–42:34]  Module 4: who owns the boundary, and how it lands in the authorization package. A cloud boundary has more owners than anything else in the workbook, and the gaps between them are where features quietly disappear. We'll name one decider per row, then write the boundary down once, as a record that the system security plan, the POA&amp;M, the component definition and continuous monitoring all cite. Then control narratives at the boundary, keeping the package current, and what to ask a provider for.
 Workbook: Book 10, Chapters 08 and 11; Appendix A.</a:t>
             </a:r>
             <a:endParaRPr lang="en-US" dirty="0"/>
@@ -2327,7 +2327,7 @@
           <a:p>
             <a:r>
               <a:rPr lang="en-US" dirty="0"/>
-              <a:t>[42:08–44:04]  The 2026 rules assign two boundaries to two owners: the provider owns the service and its certification; the agency owns its own system and everything it builds, configures and connects inside it. The roles come from four sources. SP 800-37 gives the authorizing official the boundary decision, with input from the system owner, and says explicit acceptance of risk can't be delegated; a designated representative can run the process, not sign, and the role is assigned to government personnel only. The FedRAMP agency rules supply the provider-agency split. Microsoft's shared responsibility model keeps data, configuration and identities with the customer in every service model.
+              <a:t>[42:34–44:30]  The 2026 rules assign two boundaries to two owners: the provider owns the service and its certification; the agency owns its own system and everything it builds, configures and connects inside it. The roles come from four sources. SP 800-37 gives the authorizing official the boundary decision, with input from the system owner, and says explicit acceptance of risk can't be delegated; a designated representative can run the process, not sign, and the role is assigned to government personnel only. The FedRAMP agency rules supply the provider-agency split. Microsoft's shared responsibility model keeps data, configuration and identities with the customer in every service model.
 The matrix is design guidance; adapt it, but keep one decider per row. Five rows deserve comment. The boundary row goes to the authorizing official, with the system owner doing the work, because a boundary drawn by the team that builds the landing zone follows the landing zone rather than the mission. Placement goes to the system owner, not the platform team: vending a subscription nobody recorded is the cheapest way to make an authorized system unauthorized. Feature dependency is the row the invisible boundary punishes. Exceptions split: agency-side is a risk acceptance for the authorizing official; a provider-side request is the system owner's call. And only the agency head or a delegate can require more than FedRAMP does.
 Acquisition decides more than people expect: the GCC listing says customers must buy a GCC SKU to be covered, and only contracting officers can change the contract. Across the four dimensions, the CISO decides telemetry evidence and identity trust rules, the authorizing official enforcement, and the ISSO how derived evidence is labeled.
 Workbook: Book 10, Chapter 08 — Who Owns the Boundary, "Where the roles come from," "The responsibility matrix," "An owner for each impact dimension."</a:t>
@@ -2418,7 +2418,7 @@
           <a:p>
             <a:r>
               <a:rPr lang="en-US" dirty="0"/>
-              <a:t>[44:04–45:50]  An agency never authorizes a cloud service; it authorizes its own system, and stays responsible for its own ATO or ATU even when it relies on a FedRAMP certification. SP 800-37 says the system owner assembles the package: security and privacy plans, assessment reports, POA&amp;Ms and an executive summary. When controls come from an external provider, the agency ensures the provider makes the needed information available.
+              <a:t>[44:30–46:16]  An agency never authorizes a cloud service; it authorizes its own system, and stays responsible for its own ATO or ATU even when it relies on a FedRAMP certification. SP 800-37 says the system owner assembles the package: security and privacy plans, assessment reports, POA&amp;Ms and an executive summary. When controls come from an external provider, the agency ensures the provider makes the needed information available.
 The 2026 rules say what the agency's half contains: only what the agency implements, configures, operates or inherits. Don't paste provider controls into the agency SSP, and don't blindly copy provider findings into agency POA&amp;Ms. Review the provider's package and secure configuration guides and configure accordingly; notify FedRAMP with the ATO letter; and run governance tools that produce and ingest OSCAL and JSON.
 The boundary record, kept by the system owner, holds in-scope services, tenants, subscriptions and connections, probe dispositions, the exclusion register, equivalents with their evidence class, and exceptions. Everything cites it rather than restating it, so when the probe sees a change, one record changes and every narrative is current. SA-9 is where the responsibility matrix and the three-party split get written into the plan: oversight roles and ongoing monitoring of the provider. CA-3 is where most crossings that aren't the service belong: a federated trust, a connector copying data out, a private link, each an exchange with an agreement. And drift findings cite the boundary they crossed, for example provenance drift at the GCC Moderate edge, so remediation scope is explicit.
 Workbook: Book 10, Chapter 11 — Evidencing the Boundary in the Authorization Package, "What the package is," "The boundary as one artifact"; Chapter 08, "Three parties, not two."</a:t>
@@ -2509,7 +2509,7 @@
           <a:p>
             <a:r>
               <a:rPr lang="en-US" dirty="0"/>
-              <a:t>[45:50–47:46]  Most controls aren't affected by the boundary. The ones that are fall into four patterns, and naming the pattern in each narrative lets an assessor follow it. Inherited: which package and control, and that the agency reviewed it. Shared: the provider's part by reference and the agency's part in full, including the settings from the secure configuration guide, evidenced by configuration exports and policy assignments. Agency-implemented: entirely the agency's, including agents and clients on agency systems, which the 2026 rules place outside FedRAMP and therefore inside the agency's scope. Compensating: a capability the control relied on is outside the boundary, and an equivalent does part of the work, with a POA&amp;M entry or signed exception for the remainder.
+              <a:t>[46:16–48:12]  Most controls aren't affected by the boundary. The ones that are fall into four patterns, and naming the pattern in each narrative lets an assessor follow it. Inherited: which package and control, and that the agency reviewed it. Shared: the provider's part by reference and the agency's part in full, including the settings from the secure configuration guide, evidenced by configuration exports and policy assignments. Agency-implemented: entirely the agency's, including agents and clients on agency systems, which the 2026 rules place outside FedRAMP and therefore inside the agency's scope. Compensating: a capability the control relied on is outside the boundary, and an equivalent does part of the work, with a POA&amp;M entry or signed exception for the remainder.
 The compensating pattern is easy to write badly. Naming the commercial capability as if it were in use, because it shows in the portal, is the invisible-boundary failure. Hiding the substitution is nearly as bad. A good one has the four sentences on the slide.
 Know whose package you're reading. The Marketplace record for GCC says it leverages Azure Government as the IaaS and PaaS, relies on Azure Government-inherited services and refers readers to that package, and says customers must buy a GCC SKU to be covered. So the chain runs through two provider packages before it reaches the agency; name both, and the SKU. The same record had empty trust-center and configuration-guide fields on October 21, 2026. That isn't evidence the guidance doesn't exist; get it through the package and record where it came from. And Microsoft says customers need their own authorizations for components outside its services, which is exactly what the boundary record lists.
 Workbook: Book 10, Chapter 11, "Know whose package you are reading," "Writing control narratives at the boundary."</a:t>
@@ -2689,7 +2689,7 @@
           <a:p>
             <a:r>
               <a:rPr lang="en-US" dirty="0"/>
-              <a:t>[47:46–49:36]  A package describes the system on the day it was signed, and the boundary moves in both directions after that. Three inputs feed one review. Provider change notices: none for routine recurring changes, 10 business days after adaptive ones, at least 30 business days ahead of transformative ones, in JSON, with 12 months kept. SP 800-37 says it's incumbent on the customer to make sure the provider shares monitoring information and notifies it of significant changes. Ongoing certification reports and Quarterly Reviews: agencies must review each report against the risk tolerance in their authorization, should designate a senior information security official to represent them, and must tell FedRAMP of a serious concern. And the agency's own signals, the probe rerun and drift detection, are continuous monitoring under CA-7.
+              <a:t>[48:12–50:03]  A package describes the system on the day it was signed, and the boundary moves in both directions after that. Three inputs feed one review. Provider change notices: none for routine recurring changes, 10 business days after adaptive ones, at least 30 business days ahead of transformative ones, in JSON, with 12 months kept. SP 800-37 says it's incumbent on the customer to make sure the provider shares monitoring information and notifies it of significant changes. Ongoing certification reports and Quarterly Reviews: agencies must review each report against the risk tolerance in their authorization, should designate a senior information security official to represent them, and must tell FedRAMP of a serious concern. And the agency's own signals, the probe rerun and drift detection, are continuous monitoring under CA-7.
 Anything that may change risk goes to the authorizing official, who decides whether it's a significant change, one likely to substantively affect the security or privacy posture. A provider removing a capability a compensating narrative depends on, or restoring one an exception covers, is exactly that kind of change.
 Two models run at once: mandatory adoption on January 1, 2027, no new Rev5 requests after June 11, 2027, and the scope, change and data-sharing families apply to Rev5 Class C as well. Keep the record independent of either model, pull trust-center data programmatically where a provider has one, and use OSCAL: the SSP and component definition in its implementation layer, the POA&amp;M in its assessment layer. The table is what an assessor should find, including that FedRAMP was notified with the authorization letter.
 Workbook: Book 10, Chapter 11, "Keeping the package current," "Two models at once," "What an assessor should find."</a:t>
@@ -2780,7 +2780,7 @@
           <a:p>
             <a:r>
               <a:rPr lang="en-US" dirty="0"/>
-              <a:t>[49:36–51:28]  "Give us commercial parity" can't be answered. A specific question tied to a published rule or exclusion can. Three habits make an ask hard to deflect: name one item, cite the basis with a link, and ask for data, not documents. Microsoft's ExpressRoute process sets the standard, and a provider that uses it for its own exceptions can't object to it being used in return.
+              <a:t>[50:03–51:54]  "Give us commercial parity" can't be answered. A specific question tied to a published rule or exclusion can. Three habits make an ask hard to deflect: name one item, cite the basis with a link, and ask for data, not documents. Microsoft's ExpressRoute process sets the standard, and a provider that uses it for its own exceptions can't object to it being used in return.
 The eight requests. A1: publish the per-feature exclusion list as data, with a stable identifier and a date per entry; FedRAMP already requires a public services list, and this extends it to features. A2: name the exception path per feature, remembering that FedRAMP and FISMA don't supply the regulatory trigger by themselves. A3: restore the network observability layer in GCC, or publish the specific obstacle: which data, which processing location, which control. A4: explain the same-named packages, the target date, and which exclusions, if any, Class D would lift. A5: list delivered agents and clients, and whether each is operated under shared responsibility. A6: a FedRAMP-compatible trust center with programmatic access; on October 21, 2026, none of the three Microsoft 365 government packages showed one. A7: change notifications as a JSON feed, with the 12-month history and the notification mechanism documented. A8: cryptographic modules per service with CMVP status and tenant defaults; NIST moved all FIPS 140-2 certificates to the Historical List on September 22, 2026, so validation status is a live question.
 A1, A5, A6, A7 and A8 rest on obligations the rules already place on providers. Record each request, its date and the answer in the package.
 Workbook: Book 10, Appendix A — What to Ask a Cloud Provider For.</a:t>
@@ -2871,7 +2871,7 @@
           <a:p>
             <a:r>
               <a:rPr lang="en-US" dirty="0"/>
-              <a:t>[51:28–53:21]  So, the decisions, each with an owner, all of them design guidance. The authorizing official determines the authorization boundary, meaning the services, tenants, subscriptions and connections, before workloads arrive, and the system owner keeps the record. The system owner, with the platform team, rebuilds the gap register with a citation per row and builds designs only on confirmed rows. For each gap, the system owner proposes a response, an equivalent, an exception, an alternative path or going without, and the authorizing official decides the exceptions. The platform team assigns boundary policy at the intermediate root in audit, reviews it with the ISSO, and then switches to Deny. The system owner, with the DDI team, keeps the enterprise IPAM as the authority and records the Virtual Network Manager dependency. And no landing zone stands up without a request, with the runner and state inside the boundary.
+              <a:t>[51:54–53:47]  So, the decisions, each with an owner, all of them design guidance. The authorizing official determines the authorization boundary, meaning the services, tenants, subscriptions and connections, before workloads arrive, and the system owner keeps the record. The system owner, with the platform team, rebuilds the gap register with a citation per row and builds designs only on confirmed rows. For each gap, the system owner proposes a response, an equivalent, an exception, an alternative path or going without, and the authorizing official decides the exceptions. The platform team assigns boundary policy at the intermediate root in audit, reviews it with the ISSO, and then switches to Deny. The system owner, with the DDI team, keeps the enterprise IPAM as the authority and records the Virtual Network Manager dependency. And no landing zone stands up without a request, with the runner and state inside the boundary.
 Five things to start this week that need no procurement. Re-cite every row of the gap list the agency already relies on, and relabel the rows that can't be cited. Read the Marketplace listing and class for each service in use, with the date. Assign Allowed locations in audit mode at the intermediate root. Find any subscription sitting under the tenant root, and set a default management group. And name the reviewer for provider change notices.
 The license says what you bought; the boundary says what you may use. Write the boundary down once, cite it everywhere, and keep it current. Chapters 01 through 11 and the appendices carry the detail, every claim footnoted and every code sample marked illustrative. Thank you.
 Workbook: Book 10, Chapters 01–11; Appendix A.</a:t>
@@ -14261,7 +14261,7 @@
                   <a:schemeClr val="tx2"/>
                 </a:solidFill>
               </a:rPr>
-              <a:t>AWS GovCloud Class D (High); AWS US East/West Class C (Moderate); Azure and Azure Government both Class D (High).</a:t>
+              <a:t>AWS GovCloud Class D, US East/West Class C: both hold a Moderate system; check each service per Region. Azure and Azure Government both Class D.</a:t>
             </a:r>
             <a:endParaRPr lang="en-US" sz="1650" dirty="0"/>
           </a:p>
